--- a/make_presentation/templates/templates/creative/_8.pptx
+++ b/make_presentation/templates/templates/creative/_8.pptx
@@ -74,13 +74,7 @@
               <a:rPr b="0" lang="en-US" sz="4400" spc="-1" strike="noStrike">
                 <a:latin typeface="Arial"/>
               </a:rPr>
-              <a:t>Click to move </a:t>
-            </a:r>
-            <a:r>
-              <a:rPr b="0" lang="en-US" sz="4400" spc="-1" strike="noStrike">
-                <a:latin typeface="Arial"/>
-              </a:rPr>
-              <a:t>the slide</a:t>
+              <a:t>Click to move the slide</a:t>
             </a:r>
             <a:endParaRPr b="0" lang="en-US" sz="4400" spc="-1" strike="noStrike">
               <a:latin typeface="Arial"/>
@@ -305,7 +299,7 @@
             <a:pPr algn="r">
               <a:buNone/>
             </a:pPr>
-            <a:fld id="{5D5F6FE6-931E-480F-A94C-67A2C8942F00}" type="slidenum">
+            <a:fld id="{F24556F4-C83D-452F-B143-7D8C0CC4563D}" type="slidenum">
               <a:rPr b="0" lang="en-US" sz="1400" spc="-1" strike="noStrike">
                 <a:latin typeface="Times New Roman"/>
               </a:rPr>
@@ -353,7 +347,7 @@
         <p:spPr>
           <a:xfrm>
             <a:off x="685800" y="1143000"/>
-            <a:ext cx="5485680" cy="3085560"/>
+            <a:ext cx="5485320" cy="3085200"/>
           </a:xfrm>
           <a:prstGeom prst="rect">
             <a:avLst/>
@@ -376,7 +370,7 @@
         <p:spPr>
           <a:xfrm>
             <a:off x="685800" y="4400640"/>
-            <a:ext cx="5485680" cy="3599640"/>
+            <a:ext cx="5485320" cy="3599280"/>
           </a:xfrm>
           <a:prstGeom prst="rect">
             <a:avLst/>
@@ -410,7 +404,7 @@
         <p:spPr>
           <a:xfrm>
             <a:off x="3884760" y="8685360"/>
-            <a:ext cx="2971080" cy="457920"/>
+            <a:ext cx="2970720" cy="457560"/>
           </a:xfrm>
           <a:prstGeom prst="rect">
             <a:avLst/>
@@ -442,7 +436,7 @@
               </a:lnSpc>
               <a:buNone/>
             </a:pPr>
-            <a:fld id="{AD54684D-7A25-431C-8677-F7BC25A97357}" type="slidenum">
+            <a:fld id="{4F57BFAF-7A44-4CAA-B1E3-99A354F59B56}" type="slidenum">
               <a:rPr b="0" lang="ru-RU" sz="1200" spc="-1" strike="noStrike">
                 <a:latin typeface="Times New Roman"/>
               </a:rPr>
@@ -489,7 +483,7 @@
         <p:spPr>
           <a:xfrm>
             <a:off x="685800" y="1143000"/>
-            <a:ext cx="5485680" cy="3085560"/>
+            <a:ext cx="5485320" cy="3085200"/>
           </a:xfrm>
           <a:prstGeom prst="rect">
             <a:avLst/>
@@ -512,7 +506,7 @@
         <p:spPr>
           <a:xfrm>
             <a:off x="685800" y="4400640"/>
-            <a:ext cx="5485680" cy="3599640"/>
+            <a:ext cx="5485320" cy="3599280"/>
           </a:xfrm>
           <a:prstGeom prst="rect">
             <a:avLst/>
@@ -546,7 +540,7 @@
         <p:spPr>
           <a:xfrm>
             <a:off x="3884760" y="8685360"/>
-            <a:ext cx="2971080" cy="457920"/>
+            <a:ext cx="2970720" cy="457560"/>
           </a:xfrm>
           <a:prstGeom prst="rect">
             <a:avLst/>
@@ -578,7 +572,7 @@
               </a:lnSpc>
               <a:buNone/>
             </a:pPr>
-            <a:fld id="{73E7746A-E089-4852-952E-49C38FF2422F}" type="slidenum">
+            <a:fld id="{8D56D302-C089-4801-9970-8B5A84B51F2D}" type="slidenum">
               <a:rPr b="0" lang="ru-RU" sz="1200" spc="-1" strike="noStrike">
                 <a:latin typeface="Times New Roman"/>
               </a:rPr>
@@ -646,7 +640,7 @@
         <p:txBody>
           <a:bodyPr/>
           <a:p>
-            <a:fld id="{B82C55CF-1504-4FD4-A746-5134D6FFBA70}" type="slidenum">
+            <a:fld id="{E8A1DD18-733B-4DC7-8B22-C2AEFFE96256}" type="slidenum">
               <a:t>&lt;#&gt;</a:t>
             </a:fld>
           </a:p>
@@ -708,7 +702,7 @@
         <p:spPr>
           <a:xfrm>
             <a:off x="1143000" y="841680"/>
-            <a:ext cx="6857280" cy="1789920"/>
+            <a:ext cx="6856920" cy="1789560"/>
           </a:xfrm>
           <a:prstGeom prst="rect">
             <a:avLst/>
@@ -745,7 +739,7 @@
         <p:spPr>
           <a:xfrm>
             <a:off x="457200" y="1203480"/>
-            <a:ext cx="8229240" cy="1422720"/>
+            <a:ext cx="8228880" cy="1422360"/>
           </a:xfrm>
           <a:prstGeom prst="rect">
             <a:avLst/>
@@ -778,8 +772,8 @@
         </p:nvSpPr>
         <p:spPr>
           <a:xfrm>
-            <a:off x="457200" y="2761920"/>
-            <a:ext cx="8229240" cy="1422720"/>
+            <a:off x="457200" y="2761200"/>
+            <a:ext cx="8228880" cy="1422360"/>
           </a:xfrm>
           <a:prstGeom prst="rect">
             <a:avLst/>
@@ -834,7 +828,7 @@
         <p:txBody>
           <a:bodyPr/>
           <a:p>
-            <a:fld id="{91181CB1-9282-457F-B8F5-C8170685D35F}" type="slidenum">
+            <a:fld id="{4E682E0C-9125-48D1-AA7A-52C128FE2471}" type="slidenum">
               <a:t>&lt;#&gt;</a:t>
             </a:fld>
           </a:p>
@@ -896,7 +890,7 @@
         <p:spPr>
           <a:xfrm>
             <a:off x="1143000" y="841680"/>
-            <a:ext cx="6857280" cy="1789920"/>
+            <a:ext cx="6856920" cy="1789560"/>
           </a:xfrm>
           <a:prstGeom prst="rect">
             <a:avLst/>
@@ -933,7 +927,7 @@
         <p:spPr>
           <a:xfrm>
             <a:off x="457200" y="1203480"/>
-            <a:ext cx="4015800" cy="1422720"/>
+            <a:ext cx="4015440" cy="1422360"/>
           </a:xfrm>
           <a:prstGeom prst="rect">
             <a:avLst/>
@@ -966,8 +960,8 @@
         </p:nvSpPr>
         <p:spPr>
           <a:xfrm>
-            <a:off x="4674240" y="1203480"/>
-            <a:ext cx="4015800" cy="1422720"/>
+            <a:off x="4673880" y="1203480"/>
+            <a:ext cx="4015440" cy="1422360"/>
           </a:xfrm>
           <a:prstGeom prst="rect">
             <a:avLst/>
@@ -1000,8 +994,8 @@
         </p:nvSpPr>
         <p:spPr>
           <a:xfrm>
-            <a:off x="457200" y="2761920"/>
-            <a:ext cx="4015800" cy="1422720"/>
+            <a:off x="457200" y="2761200"/>
+            <a:ext cx="4015440" cy="1422360"/>
           </a:xfrm>
           <a:prstGeom prst="rect">
             <a:avLst/>
@@ -1034,8 +1028,8 @@
         </p:nvSpPr>
         <p:spPr>
           <a:xfrm>
-            <a:off x="4674240" y="2761920"/>
-            <a:ext cx="4015800" cy="1422720"/>
+            <a:off x="4673880" y="2761200"/>
+            <a:ext cx="4015440" cy="1422360"/>
           </a:xfrm>
           <a:prstGeom prst="rect">
             <a:avLst/>
@@ -1090,7 +1084,7 @@
         <p:txBody>
           <a:bodyPr/>
           <a:p>
-            <a:fld id="{DB792444-073C-4EC4-81E6-AD6FD87396BD}" type="slidenum">
+            <a:fld id="{C77E0611-B4E6-4924-A783-C37E176688DE}" type="slidenum">
               <a:t>&lt;#&gt;</a:t>
             </a:fld>
           </a:p>
@@ -1152,7 +1146,7 @@
         <p:spPr>
           <a:xfrm>
             <a:off x="1143000" y="841680"/>
-            <a:ext cx="6857280" cy="1789920"/>
+            <a:ext cx="6856920" cy="1789560"/>
           </a:xfrm>
           <a:prstGeom prst="rect">
             <a:avLst/>
@@ -1189,7 +1183,7 @@
         <p:spPr>
           <a:xfrm>
             <a:off x="457200" y="1203480"/>
-            <a:ext cx="2649600" cy="1422720"/>
+            <a:ext cx="2649600" cy="1422360"/>
           </a:xfrm>
           <a:prstGeom prst="rect">
             <a:avLst/>
@@ -1223,7 +1217,7 @@
         <p:spPr>
           <a:xfrm>
             <a:off x="3239640" y="1203480"/>
-            <a:ext cx="2649600" cy="1422720"/>
+            <a:ext cx="2649600" cy="1422360"/>
           </a:xfrm>
           <a:prstGeom prst="rect">
             <a:avLst/>
@@ -1257,7 +1251,7 @@
         <p:spPr>
           <a:xfrm>
             <a:off x="6022080" y="1203480"/>
-            <a:ext cx="2649600" cy="1422720"/>
+            <a:ext cx="2649600" cy="1422360"/>
           </a:xfrm>
           <a:prstGeom prst="rect">
             <a:avLst/>
@@ -1290,8 +1284,8 @@
         </p:nvSpPr>
         <p:spPr>
           <a:xfrm>
-            <a:off x="457200" y="2761920"/>
-            <a:ext cx="2649600" cy="1422720"/>
+            <a:off x="457200" y="2761200"/>
+            <a:ext cx="2649600" cy="1422360"/>
           </a:xfrm>
           <a:prstGeom prst="rect">
             <a:avLst/>
@@ -1324,8 +1318,8 @@
         </p:nvSpPr>
         <p:spPr>
           <a:xfrm>
-            <a:off x="3239640" y="2761920"/>
-            <a:ext cx="2649600" cy="1422720"/>
+            <a:off x="3239640" y="2761200"/>
+            <a:ext cx="2649600" cy="1422360"/>
           </a:xfrm>
           <a:prstGeom prst="rect">
             <a:avLst/>
@@ -1358,8 +1352,8 @@
         </p:nvSpPr>
         <p:spPr>
           <a:xfrm>
-            <a:off x="6022080" y="2761920"/>
-            <a:ext cx="2649600" cy="1422720"/>
+            <a:off x="6022080" y="2761200"/>
+            <a:ext cx="2649600" cy="1422360"/>
           </a:xfrm>
           <a:prstGeom prst="rect">
             <a:avLst/>
@@ -1414,7 +1408,7 @@
         <p:txBody>
           <a:bodyPr/>
           <a:p>
-            <a:fld id="{7A418E0D-3C2F-44F1-BB66-8A161F281A7F}" type="slidenum">
+            <a:fld id="{225872F2-F14E-4C27-91D2-401CC725754B}" type="slidenum">
               <a:t>&lt;#&gt;</a:t>
             </a:fld>
           </a:p>
@@ -1476,7 +1470,7 @@
         <p:spPr>
           <a:xfrm>
             <a:off x="1143000" y="841680"/>
-            <a:ext cx="6857280" cy="1789920"/>
+            <a:ext cx="6856920" cy="1789560"/>
           </a:xfrm>
           <a:prstGeom prst="rect">
             <a:avLst/>
@@ -1513,7 +1507,7 @@
         <p:spPr>
           <a:xfrm>
             <a:off x="457200" y="1203480"/>
-            <a:ext cx="8229240" cy="2982960"/>
+            <a:ext cx="8228880" cy="2982600"/>
           </a:xfrm>
           <a:prstGeom prst="rect">
             <a:avLst/>
@@ -1571,7 +1565,7 @@
         <p:txBody>
           <a:bodyPr/>
           <a:p>
-            <a:fld id="{841D6F74-7953-4181-B9B6-A7DCDB03C101}" type="slidenum">
+            <a:fld id="{774A30C2-2E85-4D7C-9FED-B3906ECBB891}" type="slidenum">
               <a:t>&lt;#&gt;</a:t>
             </a:fld>
           </a:p>
@@ -1633,7 +1627,7 @@
         <p:spPr>
           <a:xfrm>
             <a:off x="1143000" y="841680"/>
-            <a:ext cx="6857280" cy="1789920"/>
+            <a:ext cx="6856920" cy="1789560"/>
           </a:xfrm>
           <a:prstGeom prst="rect">
             <a:avLst/>
@@ -1670,7 +1664,7 @@
         <p:spPr>
           <a:xfrm>
             <a:off x="457200" y="1203480"/>
-            <a:ext cx="8229240" cy="2982960"/>
+            <a:ext cx="8228880" cy="2982600"/>
           </a:xfrm>
           <a:prstGeom prst="rect">
             <a:avLst/>
@@ -1725,7 +1719,7 @@
         <p:txBody>
           <a:bodyPr/>
           <a:p>
-            <a:fld id="{BE2C004A-8859-4107-99A2-99362FBFF4D5}" type="slidenum">
+            <a:fld id="{BD6A9826-E744-47E8-8319-73601E459B24}" type="slidenum">
               <a:t>&lt;#&gt;</a:t>
             </a:fld>
           </a:p>
@@ -1787,7 +1781,7 @@
         <p:spPr>
           <a:xfrm>
             <a:off x="1143000" y="841680"/>
-            <a:ext cx="6857280" cy="1789920"/>
+            <a:ext cx="6856920" cy="1789560"/>
           </a:xfrm>
           <a:prstGeom prst="rect">
             <a:avLst/>
@@ -1824,7 +1818,7 @@
         <p:spPr>
           <a:xfrm>
             <a:off x="457200" y="1203480"/>
-            <a:ext cx="4015800" cy="2982960"/>
+            <a:ext cx="4015440" cy="2982600"/>
           </a:xfrm>
           <a:prstGeom prst="rect">
             <a:avLst/>
@@ -1857,8 +1851,8 @@
         </p:nvSpPr>
         <p:spPr>
           <a:xfrm>
-            <a:off x="4674240" y="1203480"/>
-            <a:ext cx="4015800" cy="2982960"/>
+            <a:off x="4673880" y="1203480"/>
+            <a:ext cx="4015440" cy="2982600"/>
           </a:xfrm>
           <a:prstGeom prst="rect">
             <a:avLst/>
@@ -1913,7 +1907,7 @@
         <p:txBody>
           <a:bodyPr/>
           <a:p>
-            <a:fld id="{7F4245AD-955A-4646-8359-938354BB6DDC}" type="slidenum">
+            <a:fld id="{E48BDDC4-A2F5-4439-865C-D3CA21D53549}" type="slidenum">
               <a:t>&lt;#&gt;</a:t>
             </a:fld>
           </a:p>
@@ -1975,7 +1969,7 @@
         <p:spPr>
           <a:xfrm>
             <a:off x="1143000" y="841680"/>
-            <a:ext cx="6857280" cy="1789920"/>
+            <a:ext cx="6856920" cy="1789560"/>
           </a:xfrm>
           <a:prstGeom prst="rect">
             <a:avLst/>
@@ -2033,7 +2027,7 @@
         <p:txBody>
           <a:bodyPr/>
           <a:p>
-            <a:fld id="{43C8001F-F1EE-4CD6-AE0E-270CC350ECDA}" type="slidenum">
+            <a:fld id="{070C4F91-B722-4E54-94D7-1B39850CBF43}" type="slidenum">
               <a:t>&lt;#&gt;</a:t>
             </a:fld>
           </a:p>
@@ -2095,7 +2089,7 @@
         <p:spPr>
           <a:xfrm>
             <a:off x="1143000" y="841680"/>
-            <a:ext cx="6857280" cy="8298360"/>
+            <a:ext cx="6856920" cy="8296560"/>
           </a:xfrm>
           <a:prstGeom prst="rect">
             <a:avLst/>
@@ -2153,7 +2147,7 @@
         <p:txBody>
           <a:bodyPr/>
           <a:p>
-            <a:fld id="{289DD867-37F5-454D-B935-1407CC43F713}" type="slidenum">
+            <a:fld id="{B2517340-0E36-45DF-B63C-3569F20C7E70}" type="slidenum">
               <a:t>&lt;#&gt;</a:t>
             </a:fld>
           </a:p>
@@ -2215,7 +2209,7 @@
         <p:spPr>
           <a:xfrm>
             <a:off x="1143000" y="841680"/>
-            <a:ext cx="6857280" cy="1789920"/>
+            <a:ext cx="6856920" cy="1789560"/>
           </a:xfrm>
           <a:prstGeom prst="rect">
             <a:avLst/>
@@ -2252,7 +2246,7 @@
         <p:spPr>
           <a:xfrm>
             <a:off x="457200" y="1203480"/>
-            <a:ext cx="4015800" cy="1422720"/>
+            <a:ext cx="4015440" cy="1422360"/>
           </a:xfrm>
           <a:prstGeom prst="rect">
             <a:avLst/>
@@ -2285,8 +2279,8 @@
         </p:nvSpPr>
         <p:spPr>
           <a:xfrm>
-            <a:off x="4674240" y="1203480"/>
-            <a:ext cx="4015800" cy="2982960"/>
+            <a:off x="4673880" y="1203480"/>
+            <a:ext cx="4015440" cy="2982600"/>
           </a:xfrm>
           <a:prstGeom prst="rect">
             <a:avLst/>
@@ -2319,8 +2313,8 @@
         </p:nvSpPr>
         <p:spPr>
           <a:xfrm>
-            <a:off x="457200" y="2761920"/>
-            <a:ext cx="4015800" cy="1422720"/>
+            <a:off x="457200" y="2761200"/>
+            <a:ext cx="4015440" cy="1422360"/>
           </a:xfrm>
           <a:prstGeom prst="rect">
             <a:avLst/>
@@ -2375,7 +2369,7 @@
         <p:txBody>
           <a:bodyPr/>
           <a:p>
-            <a:fld id="{A4069B22-317C-4DD8-B4F6-4537913028D6}" type="slidenum">
+            <a:fld id="{FAF70A07-8387-40EB-98AE-1A9019AEF984}" type="slidenum">
               <a:t>&lt;#&gt;</a:t>
             </a:fld>
           </a:p>
@@ -2437,7 +2431,7 @@
         <p:spPr>
           <a:xfrm>
             <a:off x="1143000" y="841680"/>
-            <a:ext cx="6857280" cy="1789920"/>
+            <a:ext cx="6856920" cy="1789560"/>
           </a:xfrm>
           <a:prstGeom prst="rect">
             <a:avLst/>
@@ -2474,7 +2468,7 @@
         <p:spPr>
           <a:xfrm>
             <a:off x="457200" y="1203480"/>
-            <a:ext cx="4015800" cy="2982960"/>
+            <a:ext cx="4015440" cy="2982600"/>
           </a:xfrm>
           <a:prstGeom prst="rect">
             <a:avLst/>
@@ -2507,8 +2501,8 @@
         </p:nvSpPr>
         <p:spPr>
           <a:xfrm>
-            <a:off x="4674240" y="1203480"/>
-            <a:ext cx="4015800" cy="1422720"/>
+            <a:off x="4673880" y="1203480"/>
+            <a:ext cx="4015440" cy="1422360"/>
           </a:xfrm>
           <a:prstGeom prst="rect">
             <a:avLst/>
@@ -2541,8 +2535,8 @@
         </p:nvSpPr>
         <p:spPr>
           <a:xfrm>
-            <a:off x="4674240" y="2761920"/>
-            <a:ext cx="4015800" cy="1422720"/>
+            <a:off x="4673880" y="2761200"/>
+            <a:ext cx="4015440" cy="1422360"/>
           </a:xfrm>
           <a:prstGeom prst="rect">
             <a:avLst/>
@@ -2597,7 +2591,7 @@
         <p:txBody>
           <a:bodyPr/>
           <a:p>
-            <a:fld id="{9074F4FC-8BFA-455B-98DD-791818F03009}" type="slidenum">
+            <a:fld id="{8C9379FF-043C-4CF8-A7FF-B8A5479A8770}" type="slidenum">
               <a:t>&lt;#&gt;</a:t>
             </a:fld>
           </a:p>
@@ -2659,7 +2653,7 @@
         <p:spPr>
           <a:xfrm>
             <a:off x="1143000" y="841680"/>
-            <a:ext cx="6857280" cy="1789920"/>
+            <a:ext cx="6856920" cy="1789560"/>
           </a:xfrm>
           <a:prstGeom prst="rect">
             <a:avLst/>
@@ -2696,7 +2690,7 @@
         <p:spPr>
           <a:xfrm>
             <a:off x="457200" y="1203480"/>
-            <a:ext cx="4015800" cy="1422720"/>
+            <a:ext cx="4015440" cy="1422360"/>
           </a:xfrm>
           <a:prstGeom prst="rect">
             <a:avLst/>
@@ -2729,8 +2723,8 @@
         </p:nvSpPr>
         <p:spPr>
           <a:xfrm>
-            <a:off x="4674240" y="1203480"/>
-            <a:ext cx="4015800" cy="1422720"/>
+            <a:off x="4673880" y="1203480"/>
+            <a:ext cx="4015440" cy="1422360"/>
           </a:xfrm>
           <a:prstGeom prst="rect">
             <a:avLst/>
@@ -2763,8 +2757,8 @@
         </p:nvSpPr>
         <p:spPr>
           <a:xfrm>
-            <a:off x="457200" y="2761920"/>
-            <a:ext cx="8229240" cy="1422720"/>
+            <a:off x="457200" y="2761200"/>
+            <a:ext cx="8228880" cy="1422360"/>
           </a:xfrm>
           <a:prstGeom prst="rect">
             <a:avLst/>
@@ -2819,7 +2813,7 @@
         <p:txBody>
           <a:bodyPr/>
           <a:p>
-            <a:fld id="{8A53480C-4707-4208-94CD-CDE0A5D12B42}" type="slidenum">
+            <a:fld id="{0D69874E-0D0A-427C-92AD-B8AA2D60198B}" type="slidenum">
               <a:t>&lt;#&gt;</a:t>
             </a:fld>
           </a:p>
@@ -2888,7 +2882,7 @@
         <p:spPr>
           <a:xfrm>
             <a:off x="1143000" y="841680"/>
-            <a:ext cx="6857280" cy="1789920"/>
+            <a:ext cx="6856920" cy="1789560"/>
           </a:xfrm>
           <a:prstGeom prst="rect">
             <a:avLst/>
@@ -2922,180 +2916,13 @@
             <a:spLocks noGrp="1"/>
           </p:cNvSpPr>
           <p:nvPr>
-            <p:ph type="ftr" idx="1"/>
-          </p:nvPr>
-        </p:nvSpPr>
-        <p:spPr>
-          <a:xfrm>
-            <a:off x="3029040" y="4767120"/>
-            <a:ext cx="3085560" cy="273240"/>
-          </a:xfrm>
-          <a:prstGeom prst="rect">
-            <a:avLst/>
-          </a:prstGeom>
-          <a:noFill/>
-          <a:ln w="0">
-            <a:noFill/>
-          </a:ln>
-        </p:spPr>
-        <p:txBody>
-          <a:bodyPr lIns="90000" rIns="90000" tIns="45000" bIns="45000" anchor="ctr">
-            <a:noAutofit/>
-          </a:bodyPr>
-          <a:lstStyle>
-            <a:lvl1pPr algn="ctr">
-              <a:lnSpc>
-                <a:spcPct val="100000"/>
-              </a:lnSpc>
-              <a:buNone/>
-              <a:defRPr b="0" lang="en-US" sz="1400" spc="-1" strike="noStrike">
-                <a:latin typeface="Times New Roman"/>
-              </a:defRPr>
-            </a:lvl1pPr>
-          </a:lstStyle>
-          <a:p>
-            <a:pPr algn="ctr">
-              <a:lnSpc>
-                <a:spcPct val="100000"/>
-              </a:lnSpc>
-              <a:buNone/>
-            </a:pPr>
-            <a:r>
-              <a:rPr b="0" lang="en-US" sz="1400" spc="-1" strike="noStrike">
-                <a:latin typeface="Times New Roman"/>
-              </a:rPr>
-              <a:t>&lt;footer&gt;</a:t>
-            </a:r>
-            <a:endParaRPr b="0" lang="en-US" sz="1400" spc="-1" strike="noStrike">
-              <a:latin typeface="Times New Roman"/>
-            </a:endParaRPr>
-          </a:p>
-        </p:txBody>
-      </p:sp>
-      <p:sp>
-        <p:nvSpPr>
-          <p:cNvPr id="2" name="PlaceHolder 3"/>
-          <p:cNvSpPr>
-            <a:spLocks noGrp="1"/>
-          </p:cNvSpPr>
-          <p:nvPr>
-            <p:ph type="sldNum" idx="2"/>
-          </p:nvPr>
-        </p:nvSpPr>
-        <p:spPr>
-          <a:xfrm>
-            <a:off x="6458040" y="4767120"/>
-            <a:ext cx="2056680" cy="273240"/>
-          </a:xfrm>
-          <a:prstGeom prst="rect">
-            <a:avLst/>
-          </a:prstGeom>
-          <a:noFill/>
-          <a:ln w="0">
-            <a:noFill/>
-          </a:ln>
-        </p:spPr>
-        <p:txBody>
-          <a:bodyPr lIns="90000" rIns="90000" tIns="45000" bIns="45000" anchor="ctr">
-            <a:noAutofit/>
-          </a:bodyPr>
-          <a:lstStyle>
-            <a:lvl1pPr algn="r">
-              <a:lnSpc>
-                <a:spcPct val="100000"/>
-              </a:lnSpc>
-              <a:buNone/>
-              <a:defRPr b="0" lang="en-US" sz="900" spc="-1" strike="noStrike">
-                <a:solidFill>
-                  <a:srgbClr val="8b8b8b"/>
-                </a:solidFill>
-                <a:latin typeface="Calibri"/>
-              </a:defRPr>
-            </a:lvl1pPr>
-          </a:lstStyle>
-          <a:p>
-            <a:pPr algn="r">
-              <a:lnSpc>
-                <a:spcPct val="100000"/>
-              </a:lnSpc>
-              <a:buNone/>
-            </a:pPr>
-            <a:fld id="{EE820384-58CC-4FAB-B679-42A9DF6070D4}" type="slidenum">
-              <a:rPr b="0" lang="en-US" sz="900" spc="-1" strike="noStrike">
-                <a:solidFill>
-                  <a:srgbClr val="8b8b8b"/>
-                </a:solidFill>
-                <a:latin typeface="Calibri"/>
-              </a:rPr>
-              <a:t>&lt;number&gt;</a:t>
-            </a:fld>
-            <a:endParaRPr b="0" lang="en-US" sz="900" spc="-1" strike="noStrike">
-              <a:latin typeface="Times New Roman"/>
-            </a:endParaRPr>
-          </a:p>
-        </p:txBody>
-      </p:sp>
-      <p:sp>
-        <p:nvSpPr>
-          <p:cNvPr id="3" name="PlaceHolder 4"/>
-          <p:cNvSpPr>
-            <a:spLocks noGrp="1"/>
-          </p:cNvSpPr>
-          <p:nvPr>
-            <p:ph type="dt" idx="3"/>
-          </p:nvPr>
-        </p:nvSpPr>
-        <p:spPr>
-          <a:xfrm>
-            <a:off x="628560" y="4767120"/>
-            <a:ext cx="2056680" cy="273240"/>
-          </a:xfrm>
-          <a:prstGeom prst="rect">
-            <a:avLst/>
-          </a:prstGeom>
-          <a:noFill/>
-          <a:ln w="0">
-            <a:noFill/>
-          </a:ln>
-        </p:spPr>
-        <p:txBody>
-          <a:bodyPr lIns="90000" rIns="90000" tIns="45000" bIns="45000" anchor="ctr">
-            <a:noAutofit/>
-          </a:bodyPr>
-          <a:lstStyle>
-            <a:lvl1pPr>
-              <a:defRPr b="0" lang="en-US" sz="1400" spc="-1" strike="noStrike">
-                <a:latin typeface="Times New Roman"/>
-              </a:defRPr>
-            </a:lvl1pPr>
-          </a:lstStyle>
-          <a:p>
-            <a:r>
-              <a:rPr b="0" lang="en-US" sz="1400" spc="-1" strike="noStrike">
-                <a:latin typeface="Times New Roman"/>
-              </a:rPr>
-              <a:t>&lt;date/time&gt;</a:t>
-            </a:r>
-            <a:endParaRPr b="0" lang="en-US" sz="1400" spc="-1" strike="noStrike">
-              <a:latin typeface="Times New Roman"/>
-            </a:endParaRPr>
-          </a:p>
-        </p:txBody>
-      </p:sp>
-      <p:sp>
-        <p:nvSpPr>
-          <p:cNvPr id="4" name="PlaceHolder 5"/>
-          <p:cNvSpPr>
-            <a:spLocks noGrp="1"/>
-          </p:cNvSpPr>
-          <p:nvPr>
             <p:ph type="body"/>
           </p:nvPr>
         </p:nvSpPr>
         <p:spPr>
           <a:xfrm>
             <a:off x="457200" y="1203480"/>
-            <a:ext cx="8229240" cy="2982960"/>
+            <a:ext cx="8228880" cy="2982600"/>
           </a:xfrm>
           <a:prstGeom prst="rect">
             <a:avLst/>
@@ -3122,12 +2949,12 @@
               <a:buChar char=""/>
             </a:pPr>
             <a:r>
-              <a:rPr b="0" lang="en-US" sz="3200" spc="-1" strike="noStrike">
+              <a:rPr b="0" lang="en-US" sz="1800" spc="-1" strike="noStrike">
                 <a:latin typeface="Arial"/>
               </a:rPr>
               <a:t>Click to edit the outline text format</a:t>
             </a:r>
-            <a:endParaRPr b="0" lang="en-US" sz="3200" spc="-1" strike="noStrike">
+            <a:endParaRPr b="0" lang="en-US" sz="1800" spc="-1" strike="noStrike">
               <a:latin typeface="Arial"/>
             </a:endParaRPr>
           </a:p>
@@ -3144,12 +2971,12 @@
               <a:buChar char=""/>
             </a:pPr>
             <a:r>
-              <a:rPr b="0" lang="en-US" sz="2800" spc="-1" strike="noStrike">
+              <a:rPr b="0" lang="en-US" sz="1800" spc="-1" strike="noStrike">
                 <a:latin typeface="Arial"/>
               </a:rPr>
               <a:t>Second Outline Level</a:t>
             </a:r>
-            <a:endParaRPr b="0" lang="en-US" sz="2800" spc="-1" strike="noStrike">
+            <a:endParaRPr b="0" lang="en-US" sz="1800" spc="-1" strike="noStrike">
               <a:latin typeface="Arial"/>
             </a:endParaRPr>
           </a:p>
@@ -3166,12 +2993,12 @@
               <a:buChar char=""/>
             </a:pPr>
             <a:r>
-              <a:rPr b="0" lang="en-US" sz="2400" spc="-1" strike="noStrike">
+              <a:rPr b="0" lang="en-US" sz="1800" spc="-1" strike="noStrike">
                 <a:latin typeface="Arial"/>
               </a:rPr>
               <a:t>Third Outline Level</a:t>
             </a:r>
-            <a:endParaRPr b="0" lang="en-US" sz="2400" spc="-1" strike="noStrike">
+            <a:endParaRPr b="0" lang="en-US" sz="1800" spc="-1" strike="noStrike">
               <a:latin typeface="Arial"/>
             </a:endParaRPr>
           </a:p>
@@ -3188,12 +3015,12 @@
               <a:buChar char=""/>
             </a:pPr>
             <a:r>
-              <a:rPr b="0" lang="en-US" sz="2000" spc="-1" strike="noStrike">
+              <a:rPr b="0" lang="en-US" sz="1800" spc="-1" strike="noStrike">
                 <a:latin typeface="Arial"/>
               </a:rPr>
               <a:t>Fourth Outline Level</a:t>
             </a:r>
-            <a:endParaRPr b="0" lang="en-US" sz="2000" spc="-1" strike="noStrike">
+            <a:endParaRPr b="0" lang="en-US" sz="1800" spc="-1" strike="noStrike">
               <a:latin typeface="Arial"/>
             </a:endParaRPr>
           </a:p>
@@ -3210,12 +3037,12 @@
               <a:buChar char=""/>
             </a:pPr>
             <a:r>
-              <a:rPr b="0" lang="en-US" sz="2000" spc="-1" strike="noStrike">
+              <a:rPr b="0" lang="en-US" sz="1800" spc="-1" strike="noStrike">
                 <a:latin typeface="Arial"/>
               </a:rPr>
               <a:t>Fifth Outline Level</a:t>
             </a:r>
-            <a:endParaRPr b="0" lang="en-US" sz="2000" spc="-1" strike="noStrike">
+            <a:endParaRPr b="0" lang="en-US" sz="1800" spc="-1" strike="noStrike">
               <a:latin typeface="Arial"/>
             </a:endParaRPr>
           </a:p>
@@ -3232,12 +3059,12 @@
               <a:buChar char=""/>
             </a:pPr>
             <a:r>
-              <a:rPr b="0" lang="en-US" sz="2000" spc="-1" strike="noStrike">
+              <a:rPr b="0" lang="en-US" sz="1800" spc="-1" strike="noStrike">
                 <a:latin typeface="Arial"/>
               </a:rPr>
               <a:t>Sixth Outline Level</a:t>
             </a:r>
-            <a:endParaRPr b="0" lang="en-US" sz="2000" spc="-1" strike="noStrike">
+            <a:endParaRPr b="0" lang="en-US" sz="1800" spc="-1" strike="noStrike">
               <a:latin typeface="Arial"/>
             </a:endParaRPr>
           </a:p>
@@ -3254,13 +3081,180 @@
               <a:buChar char=""/>
             </a:pPr>
             <a:r>
-              <a:rPr b="0" lang="en-US" sz="2000" spc="-1" strike="noStrike">
+              <a:rPr b="0" lang="en-US" sz="1800" spc="-1" strike="noStrike">
                 <a:latin typeface="Arial"/>
               </a:rPr>
               <a:t>Seventh Outline Level</a:t>
             </a:r>
-            <a:endParaRPr b="0" lang="en-US" sz="2000" spc="-1" strike="noStrike">
-              <a:latin typeface="Arial"/>
+            <a:endParaRPr b="0" lang="en-US" sz="1800" spc="-1" strike="noStrike">
+              <a:latin typeface="Arial"/>
+            </a:endParaRPr>
+          </a:p>
+        </p:txBody>
+      </p:sp>
+      <p:sp>
+        <p:nvSpPr>
+          <p:cNvPr id="2" name="PlaceHolder 3"/>
+          <p:cNvSpPr>
+            <a:spLocks noGrp="1"/>
+          </p:cNvSpPr>
+          <p:nvPr>
+            <p:ph type="ftr" idx="1"/>
+          </p:nvPr>
+        </p:nvSpPr>
+        <p:spPr>
+          <a:xfrm>
+            <a:off x="3029040" y="4767120"/>
+            <a:ext cx="3085200" cy="272880"/>
+          </a:xfrm>
+          <a:prstGeom prst="rect">
+            <a:avLst/>
+          </a:prstGeom>
+          <a:noFill/>
+          <a:ln w="0">
+            <a:noFill/>
+          </a:ln>
+        </p:spPr>
+        <p:txBody>
+          <a:bodyPr lIns="90000" rIns="90000" tIns="45000" bIns="45000" anchor="ctr">
+            <a:noAutofit/>
+          </a:bodyPr>
+          <a:lstStyle>
+            <a:lvl1pPr algn="ctr">
+              <a:lnSpc>
+                <a:spcPct val="100000"/>
+              </a:lnSpc>
+              <a:buNone/>
+              <a:defRPr b="0" lang="en-US" sz="1400" spc="-1" strike="noStrike">
+                <a:latin typeface="Times New Roman"/>
+              </a:defRPr>
+            </a:lvl1pPr>
+          </a:lstStyle>
+          <a:p>
+            <a:pPr algn="ctr">
+              <a:lnSpc>
+                <a:spcPct val="100000"/>
+              </a:lnSpc>
+              <a:buNone/>
+            </a:pPr>
+            <a:r>
+              <a:rPr b="0" lang="en-US" sz="1400" spc="-1" strike="noStrike">
+                <a:latin typeface="Times New Roman"/>
+              </a:rPr>
+              <a:t>&lt;footer&gt;</a:t>
+            </a:r>
+            <a:endParaRPr b="0" lang="en-US" sz="1400" spc="-1" strike="noStrike">
+              <a:latin typeface="Times New Roman"/>
+            </a:endParaRPr>
+          </a:p>
+        </p:txBody>
+      </p:sp>
+      <p:sp>
+        <p:nvSpPr>
+          <p:cNvPr id="3" name="PlaceHolder 4"/>
+          <p:cNvSpPr>
+            <a:spLocks noGrp="1"/>
+          </p:cNvSpPr>
+          <p:nvPr>
+            <p:ph type="sldNum" idx="2"/>
+          </p:nvPr>
+        </p:nvSpPr>
+        <p:spPr>
+          <a:xfrm>
+            <a:off x="6458040" y="4767120"/>
+            <a:ext cx="2056320" cy="272880"/>
+          </a:xfrm>
+          <a:prstGeom prst="rect">
+            <a:avLst/>
+          </a:prstGeom>
+          <a:noFill/>
+          <a:ln w="0">
+            <a:noFill/>
+          </a:ln>
+        </p:spPr>
+        <p:txBody>
+          <a:bodyPr lIns="90000" rIns="90000" tIns="45000" bIns="45000" anchor="ctr">
+            <a:noAutofit/>
+          </a:bodyPr>
+          <a:lstStyle>
+            <a:lvl1pPr algn="r">
+              <a:lnSpc>
+                <a:spcPct val="100000"/>
+              </a:lnSpc>
+              <a:buNone/>
+              <a:defRPr b="0" lang="en-US" sz="900" spc="-1" strike="noStrike">
+                <a:solidFill>
+                  <a:srgbClr val="8b8b8b"/>
+                </a:solidFill>
+                <a:latin typeface="Calibri"/>
+              </a:defRPr>
+            </a:lvl1pPr>
+          </a:lstStyle>
+          <a:p>
+            <a:pPr algn="r">
+              <a:lnSpc>
+                <a:spcPct val="100000"/>
+              </a:lnSpc>
+              <a:buNone/>
+            </a:pPr>
+            <a:fld id="{F2BB907C-921C-483D-A6D1-E7429DC8B58E}" type="slidenum">
+              <a:rPr b="0" lang="en-US" sz="900" spc="-1" strike="noStrike">
+                <a:solidFill>
+                  <a:srgbClr val="8b8b8b"/>
+                </a:solidFill>
+                <a:latin typeface="Calibri"/>
+              </a:rPr>
+              <a:t>&lt;number&gt;</a:t>
+            </a:fld>
+            <a:endParaRPr b="0" lang="en-US" sz="900" spc="-1" strike="noStrike">
+              <a:latin typeface="Times New Roman"/>
+            </a:endParaRPr>
+          </a:p>
+        </p:txBody>
+      </p:sp>
+      <p:sp>
+        <p:nvSpPr>
+          <p:cNvPr id="4" name="PlaceHolder 5"/>
+          <p:cNvSpPr>
+            <a:spLocks noGrp="1"/>
+          </p:cNvSpPr>
+          <p:nvPr>
+            <p:ph type="dt" idx="3"/>
+          </p:nvPr>
+        </p:nvSpPr>
+        <p:spPr>
+          <a:xfrm>
+            <a:off x="628560" y="4767120"/>
+            <a:ext cx="2056320" cy="272880"/>
+          </a:xfrm>
+          <a:prstGeom prst="rect">
+            <a:avLst/>
+          </a:prstGeom>
+          <a:noFill/>
+          <a:ln w="0">
+            <a:noFill/>
+          </a:ln>
+        </p:spPr>
+        <p:txBody>
+          <a:bodyPr lIns="90000" rIns="90000" tIns="45000" bIns="45000" anchor="ctr">
+            <a:noAutofit/>
+          </a:bodyPr>
+          <a:lstStyle>
+            <a:lvl1pPr>
+              <a:defRPr b="0" lang="en-US" sz="1400" spc="-1" strike="noStrike">
+                <a:latin typeface="Times New Roman"/>
+              </a:defRPr>
+            </a:lvl1pPr>
+          </a:lstStyle>
+          <a:p>
+            <a:r>
+              <a:rPr b="0" lang="en-US" sz="1400" spc="-1" strike="noStrike">
+                <a:latin typeface="Times New Roman"/>
+              </a:rPr>
+              <a:t>&lt;date/time&gt;</a:t>
+            </a:r>
+            <a:endParaRPr b="0" lang="en-US" sz="1400" spc="-1" strike="noStrike">
+              <a:latin typeface="Times New Roman"/>
             </a:endParaRPr>
           </a:p>
         </p:txBody>
@@ -3311,7 +3305,7 @@
         <p:spPr>
           <a:xfrm>
             <a:off x="186840" y="178200"/>
-            <a:ext cx="8769960" cy="4757760"/>
+            <a:ext cx="8769600" cy="4757400"/>
           </a:xfrm>
           <a:prstGeom prst="roundRect">
             <a:avLst>
@@ -3349,7 +3343,7 @@
         <p:spPr>
           <a:xfrm>
             <a:off x="460080" y="4445640"/>
-            <a:ext cx="2998800" cy="269280"/>
+            <a:ext cx="2998440" cy="268920"/>
           </a:xfrm>
           <a:prstGeom prst="rect">
             <a:avLst/>
@@ -3415,7 +3409,7 @@
         <p:spPr>
           <a:xfrm>
             <a:off x="2423160" y="4446360"/>
-            <a:ext cx="290880" cy="290880"/>
+            <a:ext cx="290520" cy="290520"/>
           </a:xfrm>
           <a:prstGeom prst="rect">
             <a:avLst/>
@@ -3434,7 +3428,7 @@
         <p:spPr>
           <a:xfrm>
             <a:off x="460080" y="622080"/>
-            <a:ext cx="6925680" cy="3306600"/>
+            <a:ext cx="6925320" cy="3306240"/>
           </a:xfrm>
           <a:prstGeom prst="rect">
             <a:avLst/>
@@ -3490,7 +3484,7 @@
         <p:spPr>
           <a:xfrm>
             <a:off x="5753880" y="2557440"/>
-            <a:ext cx="4009680" cy="3133080"/>
+            <a:ext cx="4009320" cy="3132720"/>
           </a:xfrm>
           <a:prstGeom prst="rect">
             <a:avLst/>
@@ -3543,7 +3537,7 @@
         <p:spPr>
           <a:xfrm>
             <a:off x="5753880" y="2557440"/>
-            <a:ext cx="4009680" cy="3133080"/>
+            <a:ext cx="4009320" cy="3132720"/>
           </a:xfrm>
           <a:prstGeom prst="rect">
             <a:avLst/>
@@ -3562,7 +3556,7 @@
         <p:spPr>
           <a:xfrm>
             <a:off x="185760" y="831240"/>
-            <a:ext cx="899280" cy="899280"/>
+            <a:ext cx="898920" cy="898920"/>
           </a:xfrm>
           <a:prstGeom prst="ellipse">
             <a:avLst/>
@@ -3622,7 +3616,7 @@
         <p:spPr>
           <a:xfrm>
             <a:off x="185760" y="2381400"/>
-            <a:ext cx="899280" cy="887400"/>
+            <a:ext cx="898920" cy="887040"/>
           </a:xfrm>
           <a:prstGeom prst="ellipse">
             <a:avLst/>
@@ -3682,7 +3676,7 @@
         <p:spPr>
           <a:xfrm>
             <a:off x="185760" y="3860640"/>
-            <a:ext cx="899280" cy="899280"/>
+            <a:ext cx="898920" cy="898920"/>
           </a:xfrm>
           <a:prstGeom prst="ellipse">
             <a:avLst/>
@@ -3742,7 +3736,7 @@
         <p:spPr>
           <a:xfrm>
             <a:off x="967680" y="797040"/>
-            <a:ext cx="3764520" cy="550440"/>
+            <a:ext cx="3764160" cy="550080"/>
           </a:xfrm>
           <a:prstGeom prst="rect">
             <a:avLst/>
@@ -3804,7 +3798,7 @@
         <p:spPr>
           <a:xfrm>
             <a:off x="967680" y="1332720"/>
-            <a:ext cx="3764520" cy="789480"/>
+            <a:ext cx="3764160" cy="789120"/>
           </a:xfrm>
           <a:prstGeom prst="rect">
             <a:avLst/>
@@ -3866,7 +3860,7 @@
         <p:spPr>
           <a:xfrm>
             <a:off x="964080" y="2292480"/>
-            <a:ext cx="3764520" cy="550440"/>
+            <a:ext cx="3764160" cy="550080"/>
           </a:xfrm>
           <a:prstGeom prst="rect">
             <a:avLst/>
@@ -3918,7 +3912,7 @@
         <p:spPr>
           <a:xfrm>
             <a:off x="964080" y="2825280"/>
-            <a:ext cx="3764520" cy="843120"/>
+            <a:ext cx="3764160" cy="842760"/>
           </a:xfrm>
           <a:prstGeom prst="rect">
             <a:avLst/>
@@ -3980,7 +3974,7 @@
         <p:spPr>
           <a:xfrm>
             <a:off x="964080" y="3777840"/>
-            <a:ext cx="3764520" cy="550440"/>
+            <a:ext cx="3764160" cy="550080"/>
           </a:xfrm>
           <a:prstGeom prst="rect">
             <a:avLst/>
@@ -4032,7 +4026,7 @@
         <p:spPr>
           <a:xfrm>
             <a:off x="964080" y="4310640"/>
-            <a:ext cx="3764520" cy="794520"/>
+            <a:ext cx="3764160" cy="794160"/>
           </a:xfrm>
           <a:prstGeom prst="rect">
             <a:avLst/>
@@ -4094,7 +4088,7 @@
         <p:spPr>
           <a:xfrm>
             <a:off x="5084640" y="987840"/>
-            <a:ext cx="3687480" cy="3496680"/>
+            <a:ext cx="3687120" cy="3496320"/>
           </a:xfrm>
           <a:prstGeom prst="roundRect">
             <a:avLst>
@@ -4158,7 +4152,7 @@
         <p:spPr>
           <a:xfrm>
             <a:off x="8519760" y="4831560"/>
-            <a:ext cx="484560" cy="226800"/>
+            <a:ext cx="484200" cy="226800"/>
           </a:xfrm>
           <a:prstGeom prst="rect">
             <a:avLst/>
@@ -4210,7 +4204,7 @@
         <p:spPr>
           <a:xfrm>
             <a:off x="421200" y="228600"/>
-            <a:ext cx="8457840" cy="685440"/>
+            <a:ext cx="8457480" cy="685080"/>
           </a:xfrm>
           <a:prstGeom prst="rect">
             <a:avLst/>
@@ -4239,7 +4233,11 @@
             </a:pPr>
             <a:r>
               <a:rPr b="0" lang="en-US" sz="1800" spc="-1" strike="noStrike">
+                <a:solidFill>
+                  <a:srgbClr val="000000"/>
+                </a:solidFill>
                 <a:latin typeface="Arial"/>
+                <a:ea typeface="DejaVu Sans"/>
               </a:rPr>
               <a:t>TITLE</a:t>
             </a:r>
@@ -4288,7 +4286,7 @@
         <p:spPr>
           <a:xfrm>
             <a:off x="506520" y="1484640"/>
-            <a:ext cx="2556720" cy="2055240"/>
+            <a:ext cx="2556360" cy="2054880"/>
           </a:xfrm>
           <a:prstGeom prst="roundRect">
             <a:avLst>
@@ -4328,7 +4326,7 @@
         <p:spPr>
           <a:xfrm>
             <a:off x="624240" y="1616760"/>
-            <a:ext cx="2289600" cy="729000"/>
+            <a:ext cx="2289240" cy="728640"/>
           </a:xfrm>
           <a:prstGeom prst="rect">
             <a:avLst/>
@@ -4380,7 +4378,7 @@
         <p:spPr>
           <a:xfrm>
             <a:off x="624240" y="2400480"/>
-            <a:ext cx="2289600" cy="1162080"/>
+            <a:ext cx="2289240" cy="1161720"/>
           </a:xfrm>
           <a:prstGeom prst="rect">
             <a:avLst/>
@@ -4442,7 +4440,7 @@
         <p:spPr>
           <a:xfrm>
             <a:off x="3309120" y="2066040"/>
-            <a:ext cx="2556720" cy="2055240"/>
+            <a:ext cx="2556360" cy="2054880"/>
           </a:xfrm>
           <a:prstGeom prst="roundRect">
             <a:avLst>
@@ -4482,7 +4480,7 @@
         <p:spPr>
           <a:xfrm>
             <a:off x="3426840" y="2198160"/>
-            <a:ext cx="2289600" cy="729000"/>
+            <a:ext cx="2289240" cy="728640"/>
           </a:xfrm>
           <a:prstGeom prst="rect">
             <a:avLst/>
@@ -4534,7 +4532,7 @@
         <p:spPr>
           <a:xfrm>
             <a:off x="3426840" y="2981880"/>
-            <a:ext cx="2289600" cy="1162080"/>
+            <a:ext cx="2289240" cy="1161720"/>
           </a:xfrm>
           <a:prstGeom prst="rect">
             <a:avLst/>
@@ -4586,7 +4584,7 @@
         <p:spPr>
           <a:xfrm>
             <a:off x="6111720" y="2659320"/>
-            <a:ext cx="2556720" cy="2055240"/>
+            <a:ext cx="2556360" cy="2054880"/>
           </a:xfrm>
           <a:prstGeom prst="roundRect">
             <a:avLst>
@@ -4626,7 +4624,7 @@
         <p:spPr>
           <a:xfrm>
             <a:off x="6229440" y="2791440"/>
-            <a:ext cx="2289600" cy="729000"/>
+            <a:ext cx="2289240" cy="728640"/>
           </a:xfrm>
           <a:prstGeom prst="rect">
             <a:avLst/>
@@ -4661,7 +4659,7 @@
                 <a:latin typeface="Arial"/>
                 <a:ea typeface="DejaVu Sans"/>
               </a:rPr>
-              <a:t>SUBTITLE2</a:t>
+              <a:t>SUBTITLE3</a:t>
             </a:r>
             <a:endParaRPr b="0" lang="en-US" sz="1400" spc="-1" strike="noStrike">
               <a:latin typeface="Arial"/>
@@ -4678,7 +4676,7 @@
         <p:spPr>
           <a:xfrm>
             <a:off x="6229440" y="3574800"/>
-            <a:ext cx="2289600" cy="1162080"/>
+            <a:ext cx="2289240" cy="1161720"/>
           </a:xfrm>
           <a:prstGeom prst="rect">
             <a:avLst/>
@@ -4713,7 +4711,7 @@
                 <a:latin typeface="Arial"/>
                 <a:ea typeface="DejaVu Sans"/>
               </a:rPr>
-              <a:t>TEXT2</a:t>
+              <a:t>TEXT3</a:t>
             </a:r>
             <a:endParaRPr b="0" lang="en-US" sz="1100" spc="-1" strike="noStrike">
               <a:latin typeface="Arial"/>
@@ -4730,7 +4728,7 @@
         <p:spPr>
           <a:xfrm>
             <a:off x="8519760" y="4831560"/>
-            <a:ext cx="484560" cy="226800"/>
+            <a:ext cx="484200" cy="226800"/>
           </a:xfrm>
           <a:prstGeom prst="rect">
             <a:avLst/>
@@ -4782,7 +4780,7 @@
         <p:spPr>
           <a:xfrm>
             <a:off x="457200" y="228600"/>
-            <a:ext cx="8229240" cy="1142640"/>
+            <a:ext cx="8228880" cy="1142280"/>
           </a:xfrm>
           <a:prstGeom prst="rect">
             <a:avLst/>
@@ -4811,7 +4809,11 @@
             </a:pPr>
             <a:r>
               <a:rPr b="0" lang="en-US" sz="1800" spc="-1" strike="noStrike">
+                <a:solidFill>
+                  <a:srgbClr val="000000"/>
+                </a:solidFill>
                 <a:latin typeface="Arial"/>
+                <a:ea typeface="DejaVu Sans"/>
               </a:rPr>
               <a:t>TITLE</a:t>
             </a:r>
@@ -4860,7 +4862,7 @@
         <p:spPr>
           <a:xfrm>
             <a:off x="3601800" y="3271680"/>
-            <a:ext cx="5236200" cy="1320840"/>
+            <a:ext cx="5235840" cy="1320480"/>
           </a:xfrm>
           <a:prstGeom prst="roundRect">
             <a:avLst>
@@ -4898,7 +4900,7 @@
         <p:spPr>
           <a:xfrm>
             <a:off x="6308640" y="1028880"/>
-            <a:ext cx="2532960" cy="2056680"/>
+            <a:ext cx="2532600" cy="2056320"/>
           </a:xfrm>
           <a:prstGeom prst="roundRect">
             <a:avLst>
@@ -4936,7 +4938,7 @@
         <p:spPr>
           <a:xfrm>
             <a:off x="3604320" y="1014480"/>
-            <a:ext cx="2532960" cy="2056680"/>
+            <a:ext cx="2532600" cy="2056320"/>
           </a:xfrm>
           <a:prstGeom prst="roundRect">
             <a:avLst>
@@ -4974,7 +4976,7 @@
         <p:spPr>
           <a:xfrm>
             <a:off x="3696480" y="1059120"/>
-            <a:ext cx="2343240" cy="713520"/>
+            <a:ext cx="2342880" cy="713160"/>
           </a:xfrm>
           <a:prstGeom prst="rect">
             <a:avLst/>
@@ -5036,7 +5038,7 @@
         <p:spPr>
           <a:xfrm>
             <a:off x="3696480" y="1843560"/>
-            <a:ext cx="2343240" cy="1141920"/>
+            <a:ext cx="2342880" cy="1141560"/>
           </a:xfrm>
           <a:prstGeom prst="rect">
             <a:avLst/>
@@ -5098,7 +5100,7 @@
         <p:spPr>
           <a:xfrm>
             <a:off x="6400080" y="1059120"/>
-            <a:ext cx="2340000" cy="713520"/>
+            <a:ext cx="2339640" cy="713160"/>
           </a:xfrm>
           <a:prstGeom prst="rect">
             <a:avLst/>
@@ -5150,7 +5152,7 @@
         <p:spPr>
           <a:xfrm>
             <a:off x="6400080" y="1843560"/>
-            <a:ext cx="2340000" cy="1141920"/>
+            <a:ext cx="2339640" cy="1141560"/>
           </a:xfrm>
           <a:prstGeom prst="rect">
             <a:avLst/>
@@ -5212,7 +5214,7 @@
         <p:spPr>
           <a:xfrm>
             <a:off x="3696480" y="3362040"/>
-            <a:ext cx="5236200" cy="328680"/>
+            <a:ext cx="5235840" cy="328320"/>
           </a:xfrm>
           <a:prstGeom prst="rect">
             <a:avLst/>
@@ -5264,7 +5266,7 @@
         <p:spPr>
           <a:xfrm>
             <a:off x="3696480" y="3713400"/>
-            <a:ext cx="5146560" cy="713520"/>
+            <a:ext cx="5146200" cy="713160"/>
           </a:xfrm>
           <a:prstGeom prst="rect">
             <a:avLst/>
@@ -5326,7 +5328,7 @@
         <p:spPr>
           <a:xfrm>
             <a:off x="384840" y="1028880"/>
-            <a:ext cx="3002400" cy="3564000"/>
+            <a:ext cx="3002040" cy="3563640"/>
           </a:xfrm>
           <a:prstGeom prst="roundRect">
             <a:avLst>
@@ -5390,7 +5392,7 @@
         <p:spPr>
           <a:xfrm>
             <a:off x="8519760" y="4831560"/>
-            <a:ext cx="484560" cy="226800"/>
+            <a:ext cx="484200" cy="226800"/>
           </a:xfrm>
           <a:prstGeom prst="rect">
             <a:avLst/>
@@ -5442,7 +5444,7 @@
         <p:spPr>
           <a:xfrm>
             <a:off x="313200" y="228600"/>
-            <a:ext cx="8457840" cy="685440"/>
+            <a:ext cx="8457480" cy="685080"/>
           </a:xfrm>
           <a:prstGeom prst="rect">
             <a:avLst/>
@@ -5471,7 +5473,11 @@
             </a:pPr>
             <a:r>
               <a:rPr b="0" lang="en-US" sz="1800" spc="-1" strike="noStrike">
+                <a:solidFill>
+                  <a:srgbClr val="000000"/>
+                </a:solidFill>
                 <a:latin typeface="Arial"/>
+                <a:ea typeface="DejaVu Sans"/>
               </a:rPr>
               <a:t>TITLE</a:t>
             </a:r>
@@ -5524,7 +5530,7 @@
         <p:spPr>
           <a:xfrm>
             <a:off x="-877680" y="2245320"/>
-            <a:ext cx="4613040" cy="3604680"/>
+            <a:ext cx="4612680" cy="3604320"/>
           </a:xfrm>
           <a:prstGeom prst="rect">
             <a:avLst/>
@@ -5543,7 +5549,7 @@
         <p:spPr>
           <a:xfrm>
             <a:off x="4157640" y="631080"/>
-            <a:ext cx="899280" cy="899280"/>
+            <a:ext cx="898920" cy="898920"/>
           </a:xfrm>
           <a:prstGeom prst="ellipse">
             <a:avLst/>
@@ -5605,7 +5611,7 @@
         <p:spPr>
           <a:xfrm>
             <a:off x="4157640" y="2127600"/>
-            <a:ext cx="899280" cy="887400"/>
+            <a:ext cx="898920" cy="887040"/>
           </a:xfrm>
           <a:prstGeom prst="ellipse">
             <a:avLst/>
@@ -5667,7 +5673,7 @@
         <p:spPr>
           <a:xfrm>
             <a:off x="4157640" y="3612240"/>
-            <a:ext cx="899280" cy="899280"/>
+            <a:ext cx="898920" cy="898920"/>
           </a:xfrm>
           <a:prstGeom prst="ellipse">
             <a:avLst/>
@@ -5729,7 +5735,7 @@
         <p:spPr>
           <a:xfrm>
             <a:off x="5146560" y="489600"/>
-            <a:ext cx="3578760" cy="550440"/>
+            <a:ext cx="3578400" cy="550080"/>
           </a:xfrm>
           <a:prstGeom prst="rect">
             <a:avLst/>
@@ -5791,7 +5797,7 @@
         <p:spPr>
           <a:xfrm>
             <a:off x="5146560" y="1025280"/>
-            <a:ext cx="3578760" cy="789480"/>
+            <a:ext cx="3578400" cy="789120"/>
           </a:xfrm>
           <a:prstGeom prst="rect">
             <a:avLst/>
@@ -5853,7 +5859,7 @@
         <p:spPr>
           <a:xfrm>
             <a:off x="5142960" y="1985400"/>
-            <a:ext cx="3578760" cy="550440"/>
+            <a:ext cx="3578400" cy="550080"/>
           </a:xfrm>
           <a:prstGeom prst="rect">
             <a:avLst/>
@@ -5905,7 +5911,7 @@
         <p:spPr>
           <a:xfrm>
             <a:off x="5142960" y="2517840"/>
-            <a:ext cx="3578760" cy="843120"/>
+            <a:ext cx="3578400" cy="842760"/>
           </a:xfrm>
           <a:prstGeom prst="rect">
             <a:avLst/>
@@ -5967,7 +5973,7 @@
         <p:spPr>
           <a:xfrm>
             <a:off x="5142960" y="3470760"/>
-            <a:ext cx="3578760" cy="550440"/>
+            <a:ext cx="3578400" cy="550080"/>
           </a:xfrm>
           <a:prstGeom prst="rect">
             <a:avLst/>
@@ -6019,7 +6025,7 @@
         <p:spPr>
           <a:xfrm>
             <a:off x="5142960" y="4003560"/>
-            <a:ext cx="3578760" cy="794520"/>
+            <a:ext cx="3578400" cy="794160"/>
           </a:xfrm>
           <a:prstGeom prst="rect">
             <a:avLst/>
@@ -6081,7 +6087,7 @@
         <p:spPr>
           <a:xfrm>
             <a:off x="8519760" y="4831560"/>
-            <a:ext cx="484560" cy="226800"/>
+            <a:ext cx="484200" cy="226800"/>
           </a:xfrm>
           <a:prstGeom prst="rect">
             <a:avLst/>
@@ -6133,7 +6139,7 @@
         <p:spPr>
           <a:xfrm>
             <a:off x="264600" y="228600"/>
-            <a:ext cx="3657240" cy="2016360"/>
+            <a:ext cx="3656880" cy="2016000"/>
           </a:xfrm>
           <a:prstGeom prst="rect">
             <a:avLst/>
@@ -6162,7 +6168,11 @@
             </a:pPr>
             <a:r>
               <a:rPr b="0" lang="en-US" sz="1800" spc="-1" strike="noStrike">
+                <a:solidFill>
+                  <a:srgbClr val="000000"/>
+                </a:solidFill>
                 <a:latin typeface="Arial"/>
+                <a:ea typeface="DejaVu Sans"/>
               </a:rPr>
               <a:t>TITLE</a:t>
             </a:r>
@@ -6211,7 +6221,7 @@
         <p:spPr>
           <a:xfrm>
             <a:off x="4238640" y="831240"/>
-            <a:ext cx="899280" cy="899280"/>
+            <a:ext cx="898920" cy="898920"/>
           </a:xfrm>
           <a:prstGeom prst="ellipse">
             <a:avLst/>
@@ -6271,7 +6281,7 @@
         <p:spPr>
           <a:xfrm>
             <a:off x="4238640" y="2243880"/>
-            <a:ext cx="899280" cy="887400"/>
+            <a:ext cx="898920" cy="887040"/>
           </a:xfrm>
           <a:prstGeom prst="ellipse">
             <a:avLst/>
@@ -6331,7 +6341,7 @@
         <p:spPr>
           <a:xfrm>
             <a:off x="4238640" y="3667320"/>
-            <a:ext cx="899280" cy="899280"/>
+            <a:ext cx="898920" cy="898920"/>
           </a:xfrm>
           <a:prstGeom prst="ellipse">
             <a:avLst/>
@@ -6391,7 +6401,7 @@
         <p:spPr>
           <a:xfrm>
             <a:off x="5020200" y="797040"/>
-            <a:ext cx="3764520" cy="550440"/>
+            <a:ext cx="3764160" cy="550080"/>
           </a:xfrm>
           <a:prstGeom prst="rect">
             <a:avLst/>
@@ -6453,7 +6463,7 @@
         <p:spPr>
           <a:xfrm>
             <a:off x="5020200" y="1332720"/>
-            <a:ext cx="3764520" cy="789480"/>
+            <a:ext cx="3764160" cy="789120"/>
           </a:xfrm>
           <a:prstGeom prst="rect">
             <a:avLst/>
@@ -6515,7 +6525,7 @@
         <p:spPr>
           <a:xfrm>
             <a:off x="5016600" y="2155320"/>
-            <a:ext cx="3764520" cy="550440"/>
+            <a:ext cx="3764160" cy="550080"/>
           </a:xfrm>
           <a:prstGeom prst="rect">
             <a:avLst/>
@@ -6567,7 +6577,7 @@
         <p:spPr>
           <a:xfrm>
             <a:off x="5016600" y="2687760"/>
-            <a:ext cx="3764520" cy="843120"/>
+            <a:ext cx="3764160" cy="842760"/>
           </a:xfrm>
           <a:prstGeom prst="rect">
             <a:avLst/>
@@ -6629,7 +6639,7 @@
         <p:spPr>
           <a:xfrm>
             <a:off x="5016600" y="3584880"/>
-            <a:ext cx="3764520" cy="550440"/>
+            <a:ext cx="3764160" cy="550080"/>
           </a:xfrm>
           <a:prstGeom prst="rect">
             <a:avLst/>
@@ -6681,7 +6691,7 @@
         <p:spPr>
           <a:xfrm>
             <a:off x="5016600" y="4117320"/>
-            <a:ext cx="3764520" cy="794520"/>
+            <a:ext cx="3764160" cy="794160"/>
           </a:xfrm>
           <a:prstGeom prst="rect">
             <a:avLst/>
@@ -6743,7 +6753,7 @@
         <p:spPr>
           <a:xfrm>
             <a:off x="384840" y="987840"/>
-            <a:ext cx="3687480" cy="3496680"/>
+            <a:ext cx="3687120" cy="3496320"/>
           </a:xfrm>
           <a:prstGeom prst="roundRect">
             <a:avLst>
@@ -6807,7 +6817,7 @@
         <p:spPr>
           <a:xfrm>
             <a:off x="8519760" y="4831560"/>
-            <a:ext cx="484560" cy="226800"/>
+            <a:ext cx="484200" cy="226800"/>
           </a:xfrm>
           <a:prstGeom prst="rect">
             <a:avLst/>
@@ -6859,7 +6869,7 @@
         <p:spPr>
           <a:xfrm>
             <a:off x="300600" y="228600"/>
-            <a:ext cx="8614440" cy="685440"/>
+            <a:ext cx="8614080" cy="685080"/>
           </a:xfrm>
           <a:prstGeom prst="rect">
             <a:avLst/>
@@ -6888,7 +6898,11 @@
             </a:pPr>
             <a:r>
               <a:rPr b="0" lang="en-US" sz="1800" spc="-1" strike="noStrike">
+                <a:solidFill>
+                  <a:srgbClr val="000000"/>
+                </a:solidFill>
                 <a:latin typeface="Arial"/>
+                <a:ea typeface="DejaVu Sans"/>
               </a:rPr>
               <a:t>TITLE</a:t>
             </a:r>
@@ -6937,7 +6951,7 @@
         <p:spPr>
           <a:xfrm>
             <a:off x="0" y="3075480"/>
-            <a:ext cx="9143280" cy="2494800"/>
+            <a:ext cx="9142920" cy="2494440"/>
           </a:xfrm>
           <a:prstGeom prst="roundRect">
             <a:avLst>
@@ -7001,7 +7015,7 @@
         <p:spPr>
           <a:xfrm>
             <a:off x="474840" y="841680"/>
-            <a:ext cx="2556720" cy="2055240"/>
+            <a:ext cx="2556360" cy="2054880"/>
           </a:xfrm>
           <a:prstGeom prst="roundRect">
             <a:avLst>
@@ -7041,7 +7055,7 @@
         <p:spPr>
           <a:xfrm>
             <a:off x="592920" y="973800"/>
-            <a:ext cx="2289600" cy="729000"/>
+            <a:ext cx="2289240" cy="728640"/>
           </a:xfrm>
           <a:prstGeom prst="rect">
             <a:avLst/>
@@ -7093,7 +7107,7 @@
         <p:spPr>
           <a:xfrm>
             <a:off x="592920" y="1757520"/>
-            <a:ext cx="2289600" cy="1162080"/>
+            <a:ext cx="2289240" cy="1161720"/>
           </a:xfrm>
           <a:prstGeom prst="rect">
             <a:avLst/>
@@ -7155,7 +7169,7 @@
         <p:spPr>
           <a:xfrm>
             <a:off x="3309120" y="841680"/>
-            <a:ext cx="2556720" cy="2055240"/>
+            <a:ext cx="2556360" cy="2054880"/>
           </a:xfrm>
           <a:prstGeom prst="roundRect">
             <a:avLst>
@@ -7195,7 +7209,7 @@
         <p:spPr>
           <a:xfrm>
             <a:off x="3426840" y="973800"/>
-            <a:ext cx="2289600" cy="729000"/>
+            <a:ext cx="2289240" cy="728640"/>
           </a:xfrm>
           <a:prstGeom prst="rect">
             <a:avLst/>
@@ -7247,7 +7261,7 @@
         <p:spPr>
           <a:xfrm>
             <a:off x="3426840" y="1757520"/>
-            <a:ext cx="2289600" cy="1162080"/>
+            <a:ext cx="2289240" cy="1161720"/>
           </a:xfrm>
           <a:prstGeom prst="rect">
             <a:avLst/>
@@ -7299,7 +7313,7 @@
         <p:spPr>
           <a:xfrm>
             <a:off x="6143040" y="841680"/>
-            <a:ext cx="2556720" cy="2055240"/>
+            <a:ext cx="2556360" cy="2054880"/>
           </a:xfrm>
           <a:prstGeom prst="roundRect">
             <a:avLst>
@@ -7339,7 +7353,7 @@
         <p:spPr>
           <a:xfrm>
             <a:off x="6260760" y="973800"/>
-            <a:ext cx="2289600" cy="729000"/>
+            <a:ext cx="2289240" cy="728640"/>
           </a:xfrm>
           <a:prstGeom prst="rect">
             <a:avLst/>
@@ -7391,7 +7405,7 @@
         <p:spPr>
           <a:xfrm>
             <a:off x="6260760" y="1757520"/>
-            <a:ext cx="2289600" cy="1162080"/>
+            <a:ext cx="2289240" cy="1161720"/>
           </a:xfrm>
           <a:prstGeom prst="rect">
             <a:avLst/>
@@ -7443,7 +7457,7 @@
         <p:spPr>
           <a:xfrm>
             <a:off x="8519760" y="4831560"/>
-            <a:ext cx="484560" cy="226800"/>
+            <a:ext cx="484200" cy="226800"/>
           </a:xfrm>
           <a:prstGeom prst="rect">
             <a:avLst/>
@@ -7495,7 +7509,7 @@
         <p:spPr>
           <a:xfrm>
             <a:off x="457200" y="349200"/>
-            <a:ext cx="8457840" cy="1022040"/>
+            <a:ext cx="8457480" cy="1021680"/>
           </a:xfrm>
           <a:prstGeom prst="rect">
             <a:avLst/>
@@ -7524,7 +7538,11 @@
             </a:pPr>
             <a:r>
               <a:rPr b="0" lang="en-US" sz="1800" spc="-1" strike="noStrike">
+                <a:solidFill>
+                  <a:srgbClr val="000000"/>
+                </a:solidFill>
                 <a:latin typeface="Arial"/>
+                <a:ea typeface="DejaVu Sans"/>
               </a:rPr>
               <a:t>TITLE</a:t>
             </a:r>
@@ -7573,7 +7591,7 @@
         <p:spPr>
           <a:xfrm>
             <a:off x="186840" y="178200"/>
-            <a:ext cx="8769960" cy="4757760"/>
+            <a:ext cx="8769600" cy="4757400"/>
           </a:xfrm>
           <a:prstGeom prst="roundRect">
             <a:avLst>
@@ -7611,7 +7629,7 @@
         <p:spPr>
           <a:xfrm>
             <a:off x="1640880" y="4489920"/>
-            <a:ext cx="2998800" cy="269280"/>
+            <a:ext cx="2998440" cy="268920"/>
           </a:xfrm>
           <a:prstGeom prst="rect">
             <a:avLst/>
@@ -7673,7 +7691,7 @@
         <p:spPr>
           <a:xfrm>
             <a:off x="867240" y="3488040"/>
-            <a:ext cx="256680" cy="256680"/>
+            <a:ext cx="256320" cy="256320"/>
           </a:xfrm>
           <a:prstGeom prst="ellipse">
             <a:avLst/>
@@ -7708,7 +7726,7 @@
         <p:spPr>
           <a:xfrm>
             <a:off x="351000" y="3691440"/>
-            <a:ext cx="1289160" cy="1133280"/>
+            <a:ext cx="1288800" cy="1132920"/>
           </a:xfrm>
           <a:prstGeom prst="rect">
             <a:avLst/>
@@ -7727,7 +7745,7 @@
         <p:spPr>
           <a:xfrm>
             <a:off x="460080" y="622080"/>
-            <a:ext cx="6925680" cy="3306600"/>
+            <a:ext cx="6925320" cy="3306240"/>
           </a:xfrm>
           <a:prstGeom prst="rect">
             <a:avLst/>
@@ -7783,7 +7801,7 @@
         <p:spPr>
           <a:xfrm>
             <a:off x="5753880" y="2557440"/>
-            <a:ext cx="4009680" cy="3133080"/>
+            <a:ext cx="4009320" cy="3132720"/>
           </a:xfrm>
           <a:prstGeom prst="rect">
             <a:avLst/>
